--- a/מצגת1.pptx
+++ b/מצגת1.pptx
@@ -3022,7 +3022,7 @@
         </p:nvSpPr>
         <p:spPr>
           <a:xfrm>
-            <a:off x="1225061" y="2189283"/>
+            <a:off x="1283812" y="1861208"/>
             <a:ext cx="1966546" cy="688731"/>
           </a:xfrm>
           <a:prstGeom prst="rect">
@@ -4007,6 +4007,138 @@
             <a:r>
               <a:rPr lang="en-US" dirty="0" smtClean="0"/>
               <a:t>9</a:t>
+            </a:r>
+            <a:endParaRPr lang="he-IL" dirty="0"/>
+          </a:p>
+        </p:txBody>
+      </p:sp>
+      <p:sp>
+        <p:nvSpPr>
+          <p:cNvPr id="42" name="מלבן 41"/>
+          <p:cNvSpPr/>
+          <p:nvPr/>
+        </p:nvSpPr>
+        <p:spPr>
+          <a:xfrm>
+            <a:off x="1207885" y="2020907"/>
+            <a:ext cx="1966546" cy="688731"/>
+          </a:xfrm>
+          <a:prstGeom prst="rect">
+            <a:avLst/>
+          </a:prstGeom>
+        </p:spPr>
+        <p:style>
+          <a:lnRef idx="2">
+            <a:schemeClr val="accent1">
+              <a:shade val="50000"/>
+            </a:schemeClr>
+          </a:lnRef>
+          <a:fillRef idx="1">
+            <a:schemeClr val="accent1"/>
+          </a:fillRef>
+          <a:effectRef idx="0">
+            <a:schemeClr val="accent1"/>
+          </a:effectRef>
+          <a:fontRef idx="minor">
+            <a:schemeClr val="lt1"/>
+          </a:fontRef>
+        </p:style>
+        <p:txBody>
+          <a:bodyPr rtlCol="1" anchor="ctr"/>
+          <a:lstStyle/>
+          <a:p>
+            <a:pPr algn="ctr"/>
+            <a:r>
+              <a:rPr lang="en-US" dirty="0" smtClean="0"/>
+              <a:t>Python service</a:t>
+            </a:r>
+            <a:endParaRPr lang="he-IL" dirty="0"/>
+          </a:p>
+        </p:txBody>
+      </p:sp>
+      <p:sp>
+        <p:nvSpPr>
+          <p:cNvPr id="43" name="מלבן 42"/>
+          <p:cNvSpPr/>
+          <p:nvPr/>
+        </p:nvSpPr>
+        <p:spPr>
+          <a:xfrm>
+            <a:off x="1111171" y="2147534"/>
+            <a:ext cx="1966546" cy="688731"/>
+          </a:xfrm>
+          <a:prstGeom prst="rect">
+            <a:avLst/>
+          </a:prstGeom>
+        </p:spPr>
+        <p:style>
+          <a:lnRef idx="2">
+            <a:schemeClr val="accent1">
+              <a:shade val="50000"/>
+            </a:schemeClr>
+          </a:lnRef>
+          <a:fillRef idx="1">
+            <a:schemeClr val="accent1"/>
+          </a:fillRef>
+          <a:effectRef idx="0">
+            <a:schemeClr val="accent1"/>
+          </a:effectRef>
+          <a:fontRef idx="minor">
+            <a:schemeClr val="lt1"/>
+          </a:fontRef>
+        </p:style>
+        <p:txBody>
+          <a:bodyPr rtlCol="1" anchor="ctr"/>
+          <a:lstStyle/>
+          <a:p>
+            <a:pPr algn="ctr"/>
+            <a:r>
+              <a:rPr lang="en-US" dirty="0" smtClean="0"/>
+              <a:t>Python service</a:t>
+            </a:r>
+            <a:endParaRPr lang="he-IL" dirty="0"/>
+          </a:p>
+        </p:txBody>
+      </p:sp>
+      <p:sp>
+        <p:nvSpPr>
+          <p:cNvPr id="45" name="מלבן 44"/>
+          <p:cNvSpPr/>
+          <p:nvPr/>
+        </p:nvSpPr>
+        <p:spPr>
+          <a:xfrm>
+            <a:off x="1035244" y="2307233"/>
+            <a:ext cx="1966546" cy="688731"/>
+          </a:xfrm>
+          <a:prstGeom prst="rect">
+            <a:avLst/>
+          </a:prstGeom>
+        </p:spPr>
+        <p:style>
+          <a:lnRef idx="2">
+            <a:schemeClr val="accent1">
+              <a:shade val="50000"/>
+            </a:schemeClr>
+          </a:lnRef>
+          <a:fillRef idx="1">
+            <a:schemeClr val="accent1"/>
+          </a:fillRef>
+          <a:effectRef idx="0">
+            <a:schemeClr val="accent1"/>
+          </a:effectRef>
+          <a:fontRef idx="minor">
+            <a:schemeClr val="lt1"/>
+          </a:fontRef>
+        </p:style>
+        <p:txBody>
+          <a:bodyPr rtlCol="1" anchor="ctr"/>
+          <a:lstStyle/>
+          <a:p>
+            <a:pPr algn="ctr"/>
+            <a:r>
+              <a:rPr lang="en-US" dirty="0" smtClean="0"/>
+              <a:t>Python service</a:t>
             </a:r>
             <a:endParaRPr lang="he-IL" dirty="0"/>
           </a:p>
